--- a/Bank Customer Churn Predection PPT.pptx
+++ b/Bank Customer Churn Predection PPT.pptx
@@ -7465,7 +7465,7 @@
           <a:p>
             <a:fld id="{1160EA64-D806-43AC-9DF2-F8C432F32B4C}" type="datetimeFigureOut">
               <a:rPr lang="en-US" dirty="0"/>
-              <a:t>3/19/2026</a:t>
+              <a:t>3/23/2026</a:t>
             </a:fld>
             <a:endParaRPr lang="en-US"/>
           </a:p>
@@ -7634,7 +7634,7 @@
           <a:p>
             <a:fld id="{E9F9C37B-1D36-470B-8223-D6C91242EC14}" type="datetimeFigureOut">
               <a:rPr lang="en-US" dirty="0"/>
-              <a:t>3/19/2026</a:t>
+              <a:t>3/23/2026</a:t>
             </a:fld>
             <a:endParaRPr lang="en-US"/>
           </a:p>
@@ -7812,7 +7812,7 @@
           <a:p>
             <a:fld id="{67C6F52A-A82B-47A2-A83A-8C4C91F2D59F}" type="datetimeFigureOut">
               <a:rPr lang="en-US" dirty="0"/>
-              <a:t>3/19/2026</a:t>
+              <a:t>3/23/2026</a:t>
             </a:fld>
             <a:endParaRPr lang="en-US"/>
           </a:p>
@@ -7980,7 +7980,7 @@
           <a:p>
             <a:fld id="{F070A7B3-6521-4DCA-87E5-044747A908C1}" type="datetimeFigureOut">
               <a:rPr lang="en-US" dirty="0"/>
-              <a:t>3/19/2026</a:t>
+              <a:t>3/23/2026</a:t>
             </a:fld>
             <a:endParaRPr lang="en-US"/>
           </a:p>
@@ -8248,7 +8248,7 @@
           <a:p>
             <a:fld id="{1160EA64-D806-43AC-9DF2-F8C432F32B4C}" type="datetimeFigureOut">
               <a:rPr lang="en-US" dirty="0"/>
-              <a:t>3/19/2026</a:t>
+              <a:t>3/23/2026</a:t>
             </a:fld>
             <a:endParaRPr lang="en-US"/>
           </a:p>
@@ -8478,7 +8478,7 @@
           <a:p>
             <a:fld id="{AB134690-1557-4C89-A502-4959FE7FAD70}" type="datetimeFigureOut">
               <a:rPr lang="en-US" dirty="0"/>
-              <a:t>3/19/2026</a:t>
+              <a:t>3/23/2026</a:t>
             </a:fld>
             <a:endParaRPr lang="en-US"/>
           </a:p>
@@ -8835,7 +8835,7 @@
           <a:p>
             <a:fld id="{4F7D4976-E339-4826-83B7-FBD03F55ECF8}" type="datetimeFigureOut">
               <a:rPr lang="en-US" dirty="0"/>
-              <a:t>3/19/2026</a:t>
+              <a:t>3/23/2026</a:t>
             </a:fld>
             <a:endParaRPr lang="en-US"/>
           </a:p>
@@ -8974,7 +8974,7 @@
           <a:p>
             <a:fld id="{E1037C31-9E7A-4F99-8774-A0E530DE1A42}" type="datetimeFigureOut">
               <a:rPr lang="en-US" dirty="0"/>
-              <a:t>3/19/2026</a:t>
+              <a:t>3/23/2026</a:t>
             </a:fld>
             <a:endParaRPr lang="en-US"/>
           </a:p>
@@ -9069,7 +9069,7 @@
           <a:p>
             <a:fld id="{C278504F-A551-4DE0-9316-4DCD1D8CC752}" type="datetimeFigureOut">
               <a:rPr lang="en-US" dirty="0"/>
-              <a:t>3/19/2026</a:t>
+              <a:t>3/23/2026</a:t>
             </a:fld>
             <a:endParaRPr lang="en-US"/>
           </a:p>
@@ -9431,7 +9431,7 @@
           <a:p>
             <a:fld id="{D1BE4249-C0D0-4B06-8692-E8BB871AF643}" type="datetimeFigureOut">
               <a:rPr lang="en-US" dirty="0"/>
-              <a:t>3/19/2026</a:t>
+              <a:t>3/23/2026</a:t>
             </a:fld>
             <a:endParaRPr lang="en-US"/>
           </a:p>
@@ -9793,7 +9793,7 @@
           <a:p>
             <a:fld id="{042B0DB6-F5C7-45FB-8CF3-31B45F9C2DAC}" type="datetimeFigureOut">
               <a:rPr lang="en-US" dirty="0"/>
-              <a:t>3/19/2026</a:t>
+              <a:t>3/23/2026</a:t>
             </a:fld>
             <a:endParaRPr lang="en-US"/>
           </a:p>
@@ -10033,7 +10033,7 @@
           <a:p>
             <a:fld id="{1160EA64-D806-43AC-9DF2-F8C432F32B4C}" type="datetimeFigureOut">
               <a:rPr lang="en-US" dirty="0"/>
-              <a:t>3/19/2026</a:t>
+              <a:t>3/23/2026</a:t>
             </a:fld>
             <a:endParaRPr lang="en-US"/>
           </a:p>
@@ -10503,7 +10503,7 @@
                 <a16:creationId xmlns:a16="http://schemas.microsoft.com/office/drawing/2014/main" id="{87D3A4E0-C908-4EA9-ABDF-E82AD6BDEF9D}"/>
               </a:ext>
               <a:ext uri="{C183D7F6-B498-43B3-948B-1728B52AA6E4}">
-                <adec:decorative xmlns:adec="http://schemas.microsoft.com/office/drawing/2017/decorative" xmlns="" val="1"/>
+                <adec:decorative xmlns="" xmlns:adec="http://schemas.microsoft.com/office/drawing/2017/decorative" val="1"/>
               </a:ext>
             </a:extLst>
           </p:cNvPr>
@@ -11168,11 +11168,7 @@
             </a:r>
             <a:r>
               <a:rPr lang="en-US" dirty="0" smtClean="0"/>
-              <a:t>   </a:t>
-            </a:r>
-            <a:r>
-              <a:rPr lang="en-US" dirty="0" smtClean="0"/>
-              <a:t>JWT authentication).</a:t>
+              <a:t>   JWT authentication).</a:t>
             </a:r>
             <a:endParaRPr lang="en-US" dirty="0"/>
           </a:p>
@@ -11268,7 +11264,7 @@
                 <a16:creationId xmlns:a16="http://schemas.microsoft.com/office/drawing/2014/main" id="{BC3E1C3D-633C-4756-B09B-9AD080714C9F}"/>
               </a:ext>
               <a:ext uri="{C183D7F6-B498-43B3-948B-1728B52AA6E4}">
-                <adec:decorative xmlns:adec="http://schemas.microsoft.com/office/drawing/2017/decorative" xmlns="" val="1"/>
+                <adec:decorative xmlns="" xmlns:adec="http://schemas.microsoft.com/office/drawing/2017/decorative" val="1"/>
               </a:ext>
             </a:extLst>
           </p:cNvPr>
@@ -11332,7 +11328,7 @@
                 <a16:creationId xmlns:a16="http://schemas.microsoft.com/office/drawing/2014/main" id="{1295DAF8-54BC-4834-A4B1-7DD2F7AFE5A3}"/>
               </a:ext>
               <a:ext uri="{C183D7F6-B498-43B3-948B-1728B52AA6E4}">
-                <adec:decorative xmlns:adec="http://schemas.microsoft.com/office/drawing/2017/decorative" xmlns="" val="1"/>
+                <adec:decorative xmlns="" xmlns:adec="http://schemas.microsoft.com/office/drawing/2017/decorative" val="1"/>
               </a:ext>
             </a:extLst>
           </p:cNvPr>
@@ -11428,7 +11424,7 @@
                 <a:hlinkClick r:id="rId2">
                   <a:extLst>
                     <a:ext uri="{A12FA001-AC4F-418D-AE19-62706E023703}">
-                      <ahyp:hlinkClr xmlns:ahyp="http://schemas.microsoft.com/office/drawing/2018/hyperlinkcolor" xmlns="" val="tx"/>
+                      <ahyp:hlinkClr xmlns="" xmlns:ahyp="http://schemas.microsoft.com/office/drawing/2018/hyperlinkcolor" val="tx"/>
                     </a:ext>
                   </a:extLst>
                 </a:hlinkClick>
@@ -11492,7 +11488,7 @@
                 <a16:creationId xmlns:a16="http://schemas.microsoft.com/office/drawing/2014/main" id="{6C2A9291-55AD-4DDC-8735-1BA5A1C98CC5}"/>
               </a:ext>
               <a:ext uri="{C183D7F6-B498-43B3-948B-1728B52AA6E4}">
-                <adec:decorative xmlns:adec="http://schemas.microsoft.com/office/drawing/2017/decorative" xmlns="" val="1"/>
+                <adec:decorative xmlns="" xmlns:adec="http://schemas.microsoft.com/office/drawing/2017/decorative" val="1"/>
               </a:ext>
             </a:extLst>
           </p:cNvPr>
@@ -11638,7 +11634,7 @@
                 <a16:creationId xmlns:a16="http://schemas.microsoft.com/office/drawing/2014/main" id="{4E866FF9-A729-45F0-A163-10E89E871602}"/>
               </a:ext>
               <a:ext uri="{C183D7F6-B498-43B3-948B-1728B52AA6E4}">
-                <adec:decorative xmlns:adec="http://schemas.microsoft.com/office/drawing/2017/decorative" xmlns="" val="1"/>
+                <adec:decorative xmlns="" xmlns:adec="http://schemas.microsoft.com/office/drawing/2017/decorative" val="1"/>
               </a:ext>
             </a:extLst>
           </p:cNvPr>
@@ -11742,7 +11738,7 @@
                 <a16:creationId xmlns:a16="http://schemas.microsoft.com/office/drawing/2014/main" id="{A804366F-2366-4688-98E7-B101C7BC6146}"/>
               </a:ext>
               <a:ext uri="{C183D7F6-B498-43B3-948B-1728B52AA6E4}">
-                <adec:decorative xmlns:adec="http://schemas.microsoft.com/office/drawing/2017/decorative" xmlns="" val="1"/>
+                <adec:decorative xmlns="" xmlns:adec="http://schemas.microsoft.com/office/drawing/2017/decorative" val="1"/>
               </a:ext>
             </a:extLst>
           </p:cNvPr>
@@ -12160,7 +12156,7 @@
                 <a16:creationId xmlns:a16="http://schemas.microsoft.com/office/drawing/2014/main" id="{2AEFFFF2-9EB4-4B6C-B9F8-2BA3EF89A21C}"/>
               </a:ext>
               <a:ext uri="{C183D7F6-B498-43B3-948B-1728B52AA6E4}">
-                <adec:decorative xmlns:adec="http://schemas.microsoft.com/office/drawing/2017/decorative" xmlns="" val="1"/>
+                <adec:decorative xmlns="" xmlns:adec="http://schemas.microsoft.com/office/drawing/2017/decorative" val="1"/>
               </a:ext>
             </a:extLst>
           </p:cNvPr>
@@ -12223,7 +12219,7 @@
                 <a16:creationId xmlns:a16="http://schemas.microsoft.com/office/drawing/2014/main" id="{0D65299F-028F-4AFC-B46A-8DB33E20FE4A}"/>
               </a:ext>
               <a:ext uri="{C183D7F6-B498-43B3-948B-1728B52AA6E4}">
-                <adec:decorative xmlns:adec="http://schemas.microsoft.com/office/drawing/2017/decorative" xmlns="" val="1"/>
+                <adec:decorative xmlns="" xmlns:adec="http://schemas.microsoft.com/office/drawing/2017/decorative" val="1"/>
               </a:ext>
             </a:extLst>
           </p:cNvPr>
@@ -12283,7 +12279,7 @@
                 <a16:creationId xmlns:a16="http://schemas.microsoft.com/office/drawing/2014/main" id="{BAC87F6E-526A-49B5-995D-42DB656594C9}"/>
               </a:ext>
               <a:ext uri="{C183D7F6-B498-43B3-948B-1728B52AA6E4}">
-                <adec:decorative xmlns:adec="http://schemas.microsoft.com/office/drawing/2017/decorative" xmlns="" val="1"/>
+                <adec:decorative xmlns="" xmlns:adec="http://schemas.microsoft.com/office/drawing/2017/decorative" val="1"/>
               </a:ext>
             </a:extLst>
           </p:cNvPr>
@@ -12439,7 +12435,19 @@
             </a:r>
             <a:r>
               <a:rPr lang="en-IN" dirty="0"/>
-              <a:t>Machine Learning Development, Web Application, Data Visualization, Video </a:t>
+              <a:t>Machine Learning </a:t>
+            </a:r>
+            <a:r>
+              <a:rPr lang="en-IN" dirty="0" smtClean="0"/>
+              <a:t>Support, Web Development</a:t>
+            </a:r>
+            <a:r>
+              <a:rPr lang="en-IN" dirty="0" smtClean="0"/>
+              <a:t>, </a:t>
+            </a:r>
+            <a:r>
+              <a:rPr lang="en-IN" dirty="0"/>
+              <a:t>Data Visualization, Video </a:t>
             </a:r>
             <a:r>
               <a:rPr lang="en-IN" dirty="0" smtClean="0"/>
@@ -12459,8 +12467,13 @@
             </a:r>
             <a:r>
               <a:rPr lang="en-IN" dirty="0" smtClean="0"/>
-              <a:t>Reprocessing, Documentation</a:t>
-            </a:r>
+              <a:t>Reprocessing, </a:t>
+            </a:r>
+            <a:r>
+              <a:rPr lang="en-IN" dirty="0"/>
+              <a:t>Documentation, Presentation</a:t>
+            </a:r>
+            <a:endParaRPr lang="en-IN" dirty="0" smtClean="0"/>
           </a:p>
           <a:p>
             <a:r>
@@ -12472,8 +12485,8 @@
               <a:t>:-  </a:t>
             </a:r>
             <a:r>
-              <a:rPr lang="en-IN" dirty="0"/>
-              <a:t>Presentation, ML Integration, Web Development, Visualization</a:t>
+              <a:rPr lang="en-IN" dirty="0" smtClean="0"/>
+              <a:t>Core development, web application, ML Integration, Visualization.</a:t>
             </a:r>
             <a:endParaRPr lang="en-IN" sz="1400" dirty="0"/>
           </a:p>
@@ -12540,7 +12553,7 @@
                 <a16:creationId xmlns:a16="http://schemas.microsoft.com/office/drawing/2014/main" id="{2AEFFFF2-9EB4-4B6C-B9F8-2BA3EF89A21C}"/>
               </a:ext>
               <a:ext uri="{C183D7F6-B498-43B3-948B-1728B52AA6E4}">
-                <adec:decorative xmlns:adec="http://schemas.microsoft.com/office/drawing/2017/decorative" xmlns="" val="1"/>
+                <adec:decorative xmlns="" xmlns:adec="http://schemas.microsoft.com/office/drawing/2017/decorative" val="1"/>
               </a:ext>
             </a:extLst>
           </p:cNvPr>
@@ -12603,7 +12616,7 @@
                 <a16:creationId xmlns:a16="http://schemas.microsoft.com/office/drawing/2014/main" id="{0D65299F-028F-4AFC-B46A-8DB33E20FE4A}"/>
               </a:ext>
               <a:ext uri="{C183D7F6-B498-43B3-948B-1728B52AA6E4}">
-                <adec:decorative xmlns:adec="http://schemas.microsoft.com/office/drawing/2017/decorative" xmlns="" val="1"/>
+                <adec:decorative xmlns="" xmlns:adec="http://schemas.microsoft.com/office/drawing/2017/decorative" val="1"/>
               </a:ext>
             </a:extLst>
           </p:cNvPr>
@@ -12663,7 +12676,7 @@
                 <a16:creationId xmlns:a16="http://schemas.microsoft.com/office/drawing/2014/main" id="{BAC87F6E-526A-49B5-995D-42DB656594C9}"/>
               </a:ext>
               <a:ext uri="{C183D7F6-B498-43B3-948B-1728B52AA6E4}">
-                <adec:decorative xmlns:adec="http://schemas.microsoft.com/office/drawing/2017/decorative" xmlns="" val="1"/>
+                <adec:decorative xmlns="" xmlns:adec="http://schemas.microsoft.com/office/drawing/2017/decorative" val="1"/>
               </a:ext>
             </a:extLst>
           </p:cNvPr>
@@ -12867,7 +12880,7 @@
                 <a16:creationId xmlns:a16="http://schemas.microsoft.com/office/drawing/2014/main" id="{2AEFFFF2-9EB4-4B6C-B9F8-2BA3EF89A21C}"/>
               </a:ext>
               <a:ext uri="{C183D7F6-B498-43B3-948B-1728B52AA6E4}">
-                <adec:decorative xmlns:adec="http://schemas.microsoft.com/office/drawing/2017/decorative" xmlns="" val="1"/>
+                <adec:decorative xmlns="" xmlns:adec="http://schemas.microsoft.com/office/drawing/2017/decorative" val="1"/>
               </a:ext>
             </a:extLst>
           </p:cNvPr>
@@ -12930,7 +12943,7 @@
                 <a16:creationId xmlns:a16="http://schemas.microsoft.com/office/drawing/2014/main" id="{0D65299F-028F-4AFC-B46A-8DB33E20FE4A}"/>
               </a:ext>
               <a:ext uri="{C183D7F6-B498-43B3-948B-1728B52AA6E4}">
-                <adec:decorative xmlns:adec="http://schemas.microsoft.com/office/drawing/2017/decorative" xmlns="" val="1"/>
+                <adec:decorative xmlns="" xmlns:adec="http://schemas.microsoft.com/office/drawing/2017/decorative" val="1"/>
               </a:ext>
             </a:extLst>
           </p:cNvPr>
@@ -12990,7 +13003,7 @@
                 <a16:creationId xmlns:a16="http://schemas.microsoft.com/office/drawing/2014/main" id="{BAC87F6E-526A-49B5-995D-42DB656594C9}"/>
               </a:ext>
               <a:ext uri="{C183D7F6-B498-43B3-948B-1728B52AA6E4}">
-                <adec:decorative xmlns:adec="http://schemas.microsoft.com/office/drawing/2017/decorative" xmlns="" val="1"/>
+                <adec:decorative xmlns="" xmlns:adec="http://schemas.microsoft.com/office/drawing/2017/decorative" val="1"/>
               </a:ext>
             </a:extLst>
           </p:cNvPr>
@@ -13203,7 +13216,7 @@
                 <a16:creationId xmlns:a16="http://schemas.microsoft.com/office/drawing/2014/main" id="{2AEFFFF2-9EB4-4B6C-B9F8-2BA3EF89A21C}"/>
               </a:ext>
               <a:ext uri="{C183D7F6-B498-43B3-948B-1728B52AA6E4}">
-                <adec:decorative xmlns:adec="http://schemas.microsoft.com/office/drawing/2017/decorative" xmlns="" val="1"/>
+                <adec:decorative xmlns="" xmlns:adec="http://schemas.microsoft.com/office/drawing/2017/decorative" val="1"/>
               </a:ext>
             </a:extLst>
           </p:cNvPr>
@@ -13266,7 +13279,7 @@
                 <a16:creationId xmlns:a16="http://schemas.microsoft.com/office/drawing/2014/main" id="{0D65299F-028F-4AFC-B46A-8DB33E20FE4A}"/>
               </a:ext>
               <a:ext uri="{C183D7F6-B498-43B3-948B-1728B52AA6E4}">
-                <adec:decorative xmlns:adec="http://schemas.microsoft.com/office/drawing/2017/decorative" xmlns="" val="1"/>
+                <adec:decorative xmlns="" xmlns:adec="http://schemas.microsoft.com/office/drawing/2017/decorative" val="1"/>
               </a:ext>
             </a:extLst>
           </p:cNvPr>
@@ -13326,7 +13339,7 @@
                 <a16:creationId xmlns:a16="http://schemas.microsoft.com/office/drawing/2014/main" id="{BAC87F6E-526A-49B5-995D-42DB656594C9}"/>
               </a:ext>
               <a:ext uri="{C183D7F6-B498-43B3-948B-1728B52AA6E4}">
-                <adec:decorative xmlns:adec="http://schemas.microsoft.com/office/drawing/2017/decorative" xmlns="" val="1"/>
+                <adec:decorative xmlns="" xmlns:adec="http://schemas.microsoft.com/office/drawing/2017/decorative" val="1"/>
               </a:ext>
             </a:extLst>
           </p:cNvPr>
@@ -13666,7 +13679,7 @@
                 <a16:creationId xmlns:a16="http://schemas.microsoft.com/office/drawing/2014/main" id="{2AEFFFF2-9EB4-4B6C-B9F8-2BA3EF89A21C}"/>
               </a:ext>
               <a:ext uri="{C183D7F6-B498-43B3-948B-1728B52AA6E4}">
-                <adec:decorative xmlns:adec="http://schemas.microsoft.com/office/drawing/2017/decorative" xmlns="" val="1"/>
+                <adec:decorative xmlns="" xmlns:adec="http://schemas.microsoft.com/office/drawing/2017/decorative" val="1"/>
               </a:ext>
             </a:extLst>
           </p:cNvPr>
@@ -13729,7 +13742,7 @@
                 <a16:creationId xmlns:a16="http://schemas.microsoft.com/office/drawing/2014/main" id="{0D65299F-028F-4AFC-B46A-8DB33E20FE4A}"/>
               </a:ext>
               <a:ext uri="{C183D7F6-B498-43B3-948B-1728B52AA6E4}">
-                <adec:decorative xmlns:adec="http://schemas.microsoft.com/office/drawing/2017/decorative" xmlns="" val="1"/>
+                <adec:decorative xmlns="" xmlns:adec="http://schemas.microsoft.com/office/drawing/2017/decorative" val="1"/>
               </a:ext>
             </a:extLst>
           </p:cNvPr>
@@ -13789,7 +13802,7 @@
                 <a16:creationId xmlns:a16="http://schemas.microsoft.com/office/drawing/2014/main" id="{BAC87F6E-526A-49B5-995D-42DB656594C9}"/>
               </a:ext>
               <a:ext uri="{C183D7F6-B498-43B3-948B-1728B52AA6E4}">
-                <adec:decorative xmlns:adec="http://schemas.microsoft.com/office/drawing/2017/decorative" xmlns="" val="1"/>
+                <adec:decorative xmlns="" xmlns:adec="http://schemas.microsoft.com/office/drawing/2017/decorative" val="1"/>
               </a:ext>
             </a:extLst>
           </p:cNvPr>
@@ -14452,7 +14465,7 @@
                 <a16:creationId xmlns:a16="http://schemas.microsoft.com/office/drawing/2014/main" id="{2AEFFFF2-9EB4-4B6C-B9F8-2BA3EF89A21C}"/>
               </a:ext>
               <a:ext uri="{C183D7F6-B498-43B3-948B-1728B52AA6E4}">
-                <adec:decorative xmlns:adec="http://schemas.microsoft.com/office/drawing/2017/decorative" xmlns="" val="1"/>
+                <adec:decorative xmlns="" xmlns:adec="http://schemas.microsoft.com/office/drawing/2017/decorative" val="1"/>
               </a:ext>
             </a:extLst>
           </p:cNvPr>
@@ -14515,7 +14528,7 @@
                 <a16:creationId xmlns:a16="http://schemas.microsoft.com/office/drawing/2014/main" id="{0D65299F-028F-4AFC-B46A-8DB33E20FE4A}"/>
               </a:ext>
               <a:ext uri="{C183D7F6-B498-43B3-948B-1728B52AA6E4}">
-                <adec:decorative xmlns:adec="http://schemas.microsoft.com/office/drawing/2017/decorative" xmlns="" val="1"/>
+                <adec:decorative xmlns="" xmlns:adec="http://schemas.microsoft.com/office/drawing/2017/decorative" val="1"/>
               </a:ext>
             </a:extLst>
           </p:cNvPr>
@@ -14575,7 +14588,7 @@
                 <a16:creationId xmlns:a16="http://schemas.microsoft.com/office/drawing/2014/main" id="{BAC87F6E-526A-49B5-995D-42DB656594C9}"/>
               </a:ext>
               <a:ext uri="{C183D7F6-B498-43B3-948B-1728B52AA6E4}">
-                <adec:decorative xmlns:adec="http://schemas.microsoft.com/office/drawing/2017/decorative" xmlns="" val="1"/>
+                <adec:decorative xmlns="" xmlns:adec="http://schemas.microsoft.com/office/drawing/2017/decorative" val="1"/>
               </a:ext>
             </a:extLst>
           </p:cNvPr>
